--- a/docs/presentacion/PYME_Studio_Presentacion.pptx
+++ b/docs/presentacion/PYME_Studio_Presentacion.pptx
@@ -2492,7 +2492,7 @@
                 <a:ea typeface="Calibri" pitchFamily="34" charset="-122"/>
                 <a:cs typeface="Calibri" pitchFamily="34" charset="-120"/>
               </a:rPr>
-              <a:t>Ignacio · Sergio Ariel Rebolledo López · [equipo]
+              <a:t>Ignacio Hidalgo · Sergio Ariel Rebolledo López · Avelyn García
 </a:t>
             </a:r>
             <a:pPr indent="0" marL="0">

--- a/docs/presentacion/PYME_Studio_Presentacion.pptx
+++ b/docs/presentacion/PYME_Studio_Presentacion.pptx
@@ -22,9 +22,10 @@
     <p:sldId id="270" r:id="rId16"/>
     <p:sldId id="271" r:id="rId17"/>
     <p:sldId id="272" r:id="rId18"/>
+    <p:sldId id="273" r:id="rId19"/>
   </p:sldIdLst>
   <p:notesMasterIdLst>
-    <p:notesMasterId r:id="rId19"/>
+    <p:notesMasterId r:id="rId20"/>
   </p:notesMasterIdLst>
   <p:sldSz cx="12192000" cy="6858000"/>
   <p:notesSz cx="6858000" cy="12192000"/>
@@ -1246,6 +1247,94 @@
             <a:fld id="{F7021451-1387-4CA6-816F-3879F97B5CBC}" type="slidenum">
               <a:rPr lang="en-US"/>
               <a:t>17</a:t>
+            </a:fld>
+            <a:endParaRPr lang="en-US"/>
+          </a:p>
+        </p:txBody>
+      </p:sp>
+    </p:spTree>
+    <p:extLst>
+      <p:ext uri="{BB962C8B-B14F-4D97-AF65-F5344CB8AC3E}">
+        <p14:creationId xmlns:p14="http://schemas.microsoft.com/office/powerpoint/2010/main" val="1024086991"/>
+      </p:ext>
+    </p:extLst>
+  </p:cSld>
+  <p:clrMapOvr>
+    <a:masterClrMapping/>
+  </p:clrMapOvr>
+</p:notes>
+</file>
+
+<file path=ppt/notesSlides/notesSlide18.xml><?xml version="1.0" encoding="utf-8"?>
+<p:notes xmlns:a="http://schemas.openxmlformats.org/drawingml/2006/main" xmlns:r="http://schemas.openxmlformats.org/officeDocument/2006/relationships" xmlns:p="http://schemas.openxmlformats.org/presentationml/2006/main">
+  <p:cSld>
+    <p:spTree>
+      <p:nvGrpSpPr>
+        <p:cNvPr id="1" name=""/>
+        <p:cNvGrpSpPr/>
+        <p:nvPr/>
+      </p:nvGrpSpPr>
+      <p:grpSpPr>
+        <a:xfrm>
+          <a:off x="0" y="0"/>
+          <a:ext cx="0" cy="0"/>
+          <a:chOff x="0" y="0"/>
+          <a:chExt cx="0" cy="0"/>
+        </a:xfrm>
+      </p:grpSpPr>
+      <p:sp>
+        <p:nvSpPr>
+          <p:cNvPr id="2" name="Slide Image Placeholder 1"/>
+          <p:cNvSpPr>
+            <a:spLocks noGrp="1" noRot="1" noChangeAspect="1"/>
+          </p:cNvSpPr>
+          <p:nvPr>
+            <p:ph type="sldImg"/>
+          </p:nvPr>
+        </p:nvSpPr>
+        <p:spPr/>
+      </p:sp>
+      <p:sp>
+        <p:nvSpPr>
+          <p:cNvPr id="3" name="Notes Placeholder 2"/>
+          <p:cNvSpPr>
+            <a:spLocks noGrp="1"/>
+          </p:cNvSpPr>
+          <p:nvPr>
+            <p:ph type="body" idx="1"/>
+          </p:nvPr>
+        </p:nvSpPr>
+        <p:spPr/>
+        <p:txBody>
+          <a:bodyPr/>
+          <a:lstStyle/>
+          <a:p>
+            <a:r>
+              <a:rPr lang="en-US" dirty="0"/>
+              <a:t/>
+            </a:r>
+            <a:endParaRPr lang="en-US" dirty="0"/>
+          </a:p>
+        </p:txBody>
+      </p:sp>
+      <p:sp>
+        <p:nvSpPr>
+          <p:cNvPr id="4" name="Slide Number Placeholder 3"/>
+          <p:cNvSpPr>
+            <a:spLocks noGrp="1"/>
+          </p:cNvSpPr>
+          <p:nvPr>
+            <p:ph type="sldNum" sz="quarter" idx="10"/>
+          </p:nvPr>
+        </p:nvSpPr>
+        <p:spPr/>
+        <p:txBody>
+          <a:bodyPr/>
+          <a:lstStyle/>
+          <a:p>
+            <a:fld id="{F7021451-1387-4CA6-816F-3879F97B5CBC}" type="slidenum">
+              <a:rPr lang="en-US"/>
+              <a:t>18</a:t>
             </a:fld>
             <a:endParaRPr lang="en-US"/>
           </a:p>
@@ -2610,7 +2699,7 @@
                 <a:ea typeface="Courier New" pitchFamily="34" charset="-122"/>
                 <a:cs typeface="Courier New" pitchFamily="34" charset="-120"/>
               </a:rPr>
-              <a:t>01 / 17</a:t>
+              <a:t>01 / 18</a:t>
             </a:r>
             <a:endParaRPr lang="en-US" sz="900" dirty="0"/>
           </a:p>
@@ -2822,7 +2911,7 @@
                 <a:ea typeface="Courier New" pitchFamily="34" charset="-122"/>
                 <a:cs typeface="Courier New" pitchFamily="34" charset="-120"/>
               </a:rPr>
-              <a:t>10 / 17</a:t>
+              <a:t>10 / 18</a:t>
             </a:r>
             <a:endParaRPr lang="en-US" sz="900" dirty="0"/>
           </a:p>
@@ -3353,7 +3442,7 @@
                 <a:ea typeface="Courier New" pitchFamily="34" charset="-122"/>
                 <a:cs typeface="Courier New" pitchFamily="34" charset="-120"/>
               </a:rPr>
-              <a:t>11 / 17</a:t>
+              <a:t>11 / 18</a:t>
             </a:r>
             <a:endParaRPr lang="en-US" sz="900" dirty="0"/>
           </a:p>
@@ -3731,7 +3820,7 @@
                 <a:ea typeface="Courier New" pitchFamily="34" charset="-122"/>
                 <a:cs typeface="Courier New" pitchFamily="34" charset="-120"/>
               </a:rPr>
-              <a:t>12 / 17</a:t>
+              <a:t>12 / 18</a:t>
             </a:r>
             <a:endParaRPr lang="en-US" sz="900" dirty="0"/>
           </a:p>
@@ -4808,7 +4897,7 @@
                 <a:ea typeface="Courier New" pitchFamily="34" charset="-122"/>
                 <a:cs typeface="Courier New" pitchFamily="34" charset="-120"/>
               </a:rPr>
-              <a:t>13 / 17</a:t>
+              <a:t>13 / 18</a:t>
             </a:r>
             <a:endParaRPr lang="en-US" sz="900" dirty="0"/>
           </a:p>
@@ -5579,7 +5668,7 @@
                 <a:ea typeface="Courier New" pitchFamily="34" charset="-122"/>
                 <a:cs typeface="Courier New" pitchFamily="34" charset="-120"/>
               </a:rPr>
-              <a:t>14 / 17</a:t>
+              <a:t>14 / 18</a:t>
             </a:r>
             <a:endParaRPr lang="en-US" sz="900" dirty="0"/>
           </a:p>
@@ -6233,7 +6322,7 @@
                 <a:ea typeface="Courier New" pitchFamily="34" charset="-122"/>
                 <a:cs typeface="Courier New" pitchFamily="34" charset="-120"/>
               </a:rPr>
-              <a:t>15 / 17</a:t>
+              <a:t>15 / 18</a:t>
             </a:r>
             <a:endParaRPr lang="en-US" sz="900" dirty="0"/>
           </a:p>
@@ -6273,6 +6362,458 @@
       </p:grpSpPr>
       <p:sp>
         <p:nvSpPr>
+          <p:cNvPr id="2" name="Text 0"/>
+          <p:cNvSpPr/>
+          <p:nvPr/>
+        </p:nvSpPr>
+        <p:spPr>
+          <a:xfrm>
+            <a:off x="548640" y="457200"/>
+            <a:ext cx="8229600" cy="365760"/>
+          </a:xfrm>
+          <a:prstGeom prst="rect">
+            <a:avLst/>
+          </a:prstGeom>
+          <a:noFill/>
+          <a:ln/>
+        </p:spPr>
+        <p:txBody>
+          <a:bodyPr wrap="square" lIns="0" tIns="0" rIns="0" bIns="0" rtlCol="0" anchor="ctr"/>
+          <a:lstStyle/>
+          <a:p>
+            <a:pPr indent="0" marL="0">
+              <a:buNone/>
+            </a:pPr>
+            <a:r>
+              <a:rPr lang="en-US" sz="1200" b="1" spc="200" kern="0" dirty="0">
+                <a:solidFill>
+                  <a:srgbClr val="C2632A"/>
+                </a:solidFill>
+                <a:latin typeface="Courier New" pitchFamily="34" charset="0"/>
+                <a:ea typeface="Courier New" pitchFamily="34" charset="-122"/>
+                <a:cs typeface="Courier New" pitchFamily="34" charset="-120"/>
+              </a:rPr>
+              <a:t>ROBUSTEZ METODOLÓGICA (CONTINUACIÓN)</a:t>
+            </a:r>
+            <a:endParaRPr lang="en-US" sz="1200" dirty="0"/>
+          </a:p>
+        </p:txBody>
+      </p:sp>
+      <p:sp>
+        <p:nvSpPr>
+          <p:cNvPr id="3" name="Text 1"/>
+          <p:cNvSpPr/>
+          <p:nvPr/>
+        </p:nvSpPr>
+        <p:spPr>
+          <a:xfrm>
+            <a:off x="548640" y="868680"/>
+            <a:ext cx="10789920" cy="548640"/>
+          </a:xfrm>
+          <a:prstGeom prst="rect">
+            <a:avLst/>
+          </a:prstGeom>
+          <a:noFill/>
+          <a:ln/>
+        </p:spPr>
+        <p:txBody>
+          <a:bodyPr wrap="square" lIns="0" tIns="0" rIns="0" bIns="0" rtlCol="0" anchor="ctr"/>
+          <a:lstStyle/>
+          <a:p>
+            <a:pPr indent="0" marL="0">
+              <a:buNone/>
+            </a:pPr>
+            <a:r>
+              <a:rPr lang="en-US" sz="2400" b="1" dirty="0">
+                <a:solidFill>
+                  <a:srgbClr val="16222B"/>
+                </a:solidFill>
+                <a:latin typeface="Cambria" pitchFamily="34" charset="0"/>
+                <a:ea typeface="Cambria" pitchFamily="34" charset="-122"/>
+                <a:cs typeface="Cambria" pitchFamily="34" charset="-120"/>
+              </a:rPr>
+              <a:t>¿Se sostiene probando 19 rubros a la vez, y en el tiempo?</a:t>
+            </a:r>
+            <a:endParaRPr lang="en-US" sz="2400" dirty="0"/>
+          </a:p>
+        </p:txBody>
+      </p:sp>
+      <p:sp>
+        <p:nvSpPr>
+          <p:cNvPr id="4" name="Shape 2"/>
+          <p:cNvSpPr/>
+          <p:nvPr/>
+        </p:nvSpPr>
+        <p:spPr>
+          <a:xfrm>
+            <a:off x="548640" y="1874520"/>
+            <a:ext cx="91440" cy="1188720"/>
+          </a:xfrm>
+          <a:prstGeom prst="rect">
+            <a:avLst/>
+          </a:prstGeom>
+          <a:solidFill>
+            <a:srgbClr val="2F8F5B"/>
+          </a:solidFill>
+          <a:ln/>
+        </p:spPr>
+      </p:sp>
+      <p:sp>
+        <p:nvSpPr>
+          <p:cNvPr id="5" name="Text 3"/>
+          <p:cNvSpPr/>
+          <p:nvPr/>
+        </p:nvSpPr>
+        <p:spPr>
+          <a:xfrm>
+            <a:off x="868680" y="1856232"/>
+            <a:ext cx="10332720" cy="411480"/>
+          </a:xfrm>
+          <a:prstGeom prst="rect">
+            <a:avLst/>
+          </a:prstGeom>
+          <a:noFill/>
+          <a:ln/>
+        </p:spPr>
+        <p:txBody>
+          <a:bodyPr wrap="square" lIns="0" tIns="0" rIns="0" bIns="0" rtlCol="0" anchor="ctr"/>
+          <a:lstStyle/>
+          <a:p>
+            <a:pPr indent="0" marL="0">
+              <a:buNone/>
+            </a:pPr>
+            <a:r>
+              <a:rPr lang="en-US" sz="1450" b="1" dirty="0">
+                <a:solidFill>
+                  <a:srgbClr val="16222B"/>
+                </a:solidFill>
+                <a:latin typeface="Cambria" pitchFamily="34" charset="0"/>
+                <a:ea typeface="Cambria" pitchFamily="34" charset="-122"/>
+                <a:cs typeface="Cambria" pitchFamily="34" charset="-120"/>
+              </a:rPr>
+              <a:t>¿Sobreviven las 19 correlaciones a probarse todas a la vez?</a:t>
+            </a:r>
+            <a:endParaRPr lang="en-US" sz="1450" dirty="0"/>
+          </a:p>
+        </p:txBody>
+      </p:sp>
+      <p:sp>
+        <p:nvSpPr>
+          <p:cNvPr id="6" name="Text 4"/>
+          <p:cNvSpPr/>
+          <p:nvPr/>
+        </p:nvSpPr>
+        <p:spPr>
+          <a:xfrm>
+            <a:off x="868680" y="2258568"/>
+            <a:ext cx="10332720" cy="777240"/>
+          </a:xfrm>
+          <a:prstGeom prst="rect">
+            <a:avLst/>
+          </a:prstGeom>
+          <a:noFill/>
+          <a:ln/>
+        </p:spPr>
+        <p:txBody>
+          <a:bodyPr wrap="square" lIns="0" tIns="0" rIns="0" bIns="0" rtlCol="0" anchor="ctr"/>
+          <a:lstStyle/>
+          <a:p>
+            <a:pPr indent="0" marL="0">
+              <a:lnSpc>
+                <a:spcPct val="125000"/>
+              </a:lnSpc>
+              <a:buNone/>
+            </a:pPr>
+            <a:r>
+              <a:rPr lang="en-US" sz="1150" dirty="0">
+                <a:solidFill>
+                  <a:srgbClr val="52697A"/>
+                </a:solidFill>
+                <a:latin typeface="Calibri" pitchFamily="34" charset="0"/>
+                <a:ea typeface="Calibri" pitchFamily="34" charset="-122"/>
+                <a:cs typeface="Calibri" pitchFamily="34" charset="-120"/>
+              </a:rPr>
+              <a:t>Sí, en su mayoría. De 12 rubros significativos sin ajustar, los 12 se mantienen con la corrección FDR (Benjamini-Hochberg) y 11 con Bonferroni, más estricta. Comercio, Alojamiento/Comidas y Agricultura — el hallazgo central — se mantienen significativos bajo ambos criterios.</a:t>
+            </a:r>
+            <a:endParaRPr lang="en-US" sz="1150" dirty="0"/>
+          </a:p>
+        </p:txBody>
+      </p:sp>
+      <p:sp>
+        <p:nvSpPr>
+          <p:cNvPr id="7" name="Shape 5"/>
+          <p:cNvSpPr/>
+          <p:nvPr/>
+        </p:nvSpPr>
+        <p:spPr>
+          <a:xfrm>
+            <a:off x="548640" y="3291840"/>
+            <a:ext cx="91440" cy="1188720"/>
+          </a:xfrm>
+          <a:prstGeom prst="rect">
+            <a:avLst/>
+          </a:prstGeom>
+          <a:solidFill>
+            <a:srgbClr val="C2632A"/>
+          </a:solidFill>
+          <a:ln/>
+        </p:spPr>
+      </p:sp>
+      <p:sp>
+        <p:nvSpPr>
+          <p:cNvPr id="8" name="Text 6"/>
+          <p:cNvSpPr/>
+          <p:nvPr/>
+        </p:nvSpPr>
+        <p:spPr>
+          <a:xfrm>
+            <a:off x="868680" y="3273552"/>
+            <a:ext cx="10332720" cy="411480"/>
+          </a:xfrm>
+          <a:prstGeom prst="rect">
+            <a:avLst/>
+          </a:prstGeom>
+          <a:noFill/>
+          <a:ln/>
+        </p:spPr>
+        <p:txBody>
+          <a:bodyPr wrap="square" lIns="0" tIns="0" rIns="0" bIns="0" rtlCol="0" anchor="ctr"/>
+          <a:lstStyle/>
+          <a:p>
+            <a:pPr indent="0" marL="0">
+              <a:buNone/>
+            </a:pPr>
+            <a:r>
+              <a:rPr lang="en-US" sz="1450" b="1" dirty="0">
+                <a:solidFill>
+                  <a:srgbClr val="16222B"/>
+                </a:solidFill>
+                <a:latin typeface="Cambria" pitchFamily="34" charset="0"/>
+                <a:ea typeface="Cambria" pitchFamily="34" charset="-122"/>
+                <a:cs typeface="Cambria" pitchFamily="34" charset="-120"/>
+              </a:rPr>
+              <a:t>¿La relación es igual de fuerte en todo el período 2005-2024?</a:t>
+            </a:r>
+            <a:endParaRPr lang="en-US" sz="1450" dirty="0"/>
+          </a:p>
+        </p:txBody>
+      </p:sp>
+      <p:sp>
+        <p:nvSpPr>
+          <p:cNvPr id="9" name="Text 7"/>
+          <p:cNvSpPr/>
+          <p:nvPr/>
+        </p:nvSpPr>
+        <p:spPr>
+          <a:xfrm>
+            <a:off x="868680" y="3675888"/>
+            <a:ext cx="10332720" cy="777240"/>
+          </a:xfrm>
+          <a:prstGeom prst="rect">
+            <a:avLst/>
+          </a:prstGeom>
+          <a:noFill/>
+          <a:ln/>
+        </p:spPr>
+        <p:txBody>
+          <a:bodyPr wrap="square" lIns="0" tIns="0" rIns="0" bIns="0" rtlCol="0" anchor="ctr"/>
+          <a:lstStyle/>
+          <a:p>
+            <a:pPr indent="0" marL="0">
+              <a:lnSpc>
+                <a:spcPct val="125000"/>
+              </a:lnSpc>
+              <a:buNone/>
+            </a:pPr>
+            <a:r>
+              <a:rPr lang="en-US" sz="1150" dirty="0">
+                <a:solidFill>
+                  <a:srgbClr val="52697A"/>
+                </a:solidFill>
+                <a:latin typeface="Calibri" pitchFamily="34" charset="0"/>
+                <a:ea typeface="Calibri" pitchFamily="34" charset="-122"/>
+                <a:cs typeface="Calibri" pitchFamily="34" charset="-120"/>
+              </a:rPr>
+              <a:t>No. Comercio y Alojamiento/Comidas se fortalecen con el tiempo: débiles o no significativos en 2005-2010, consistentemente más fuertes hacia 2020-2024 — nunca cambian de signo. Agricultura sí cambia de signo: positivo en 2005-2010, negativo desde 2016 en adelante.</a:t>
+            </a:r>
+            <a:endParaRPr lang="en-US" sz="1150" dirty="0"/>
+          </a:p>
+        </p:txBody>
+      </p:sp>
+      <p:sp>
+        <p:nvSpPr>
+          <p:cNvPr id="10" name="Shape 8"/>
+          <p:cNvSpPr/>
+          <p:nvPr/>
+        </p:nvSpPr>
+        <p:spPr>
+          <a:xfrm>
+            <a:off x="548640" y="4846320"/>
+            <a:ext cx="11109960" cy="960120"/>
+          </a:xfrm>
+          <a:prstGeom prst="rect">
+            <a:avLst/>
+          </a:prstGeom>
+          <a:solidFill>
+            <a:srgbClr val="0F2C42"/>
+          </a:solidFill>
+          <a:ln/>
+        </p:spPr>
+      </p:sp>
+      <p:sp>
+        <p:nvSpPr>
+          <p:cNvPr id="11" name="Text 9"/>
+          <p:cNvSpPr/>
+          <p:nvPr/>
+        </p:nvSpPr>
+        <p:spPr>
+          <a:xfrm>
+            <a:off x="777240" y="4946904"/>
+            <a:ext cx="10652760" cy="237744"/>
+          </a:xfrm>
+          <a:prstGeom prst="rect">
+            <a:avLst/>
+          </a:prstGeom>
+          <a:noFill/>
+          <a:ln/>
+        </p:spPr>
+        <p:txBody>
+          <a:bodyPr wrap="square" lIns="0" tIns="0" rIns="0" bIns="0" rtlCol="0" anchor="ctr"/>
+          <a:lstStyle/>
+          <a:p>
+            <a:pPr indent="0" marL="0">
+              <a:buNone/>
+            </a:pPr>
+            <a:r>
+              <a:rPr lang="en-US" sz="950" b="1" spc="100" kern="0" dirty="0">
+                <a:solidFill>
+                  <a:srgbClr val="7FC1EA"/>
+                </a:solidFill>
+                <a:latin typeface="Courier New" pitchFamily="34" charset="0"/>
+                <a:ea typeface="Courier New" pitchFamily="34" charset="-122"/>
+                <a:cs typeface="Courier New" pitchFamily="34" charset="-120"/>
+              </a:rPr>
+              <a:t>CONCLUSIÓN PRUDENTE</a:t>
+            </a:r>
+            <a:endParaRPr lang="en-US" sz="950" dirty="0"/>
+          </a:p>
+        </p:txBody>
+      </p:sp>
+      <p:sp>
+        <p:nvSpPr>
+          <p:cNvPr id="12" name="Text 10"/>
+          <p:cNvSpPr/>
+          <p:nvPr/>
+        </p:nvSpPr>
+        <p:spPr>
+          <a:xfrm>
+            <a:off x="777240" y="5202936"/>
+            <a:ext cx="10652760" cy="548640"/>
+          </a:xfrm>
+          <a:prstGeom prst="rect">
+            <a:avLst/>
+          </a:prstGeom>
+          <a:noFill/>
+          <a:ln/>
+        </p:spPr>
+        <p:txBody>
+          <a:bodyPr wrap="square" lIns="0" tIns="0" rIns="0" bIns="0" rtlCol="0" anchor="ctr"/>
+          <a:lstStyle/>
+          <a:p>
+            <a:pPr indent="0" marL="0">
+              <a:lnSpc>
+                <a:spcPct val="120000"/>
+              </a:lnSpc>
+              <a:buNone/>
+            </a:pPr>
+            <a:r>
+              <a:rPr lang="en-US" sz="1100" dirty="0">
+                <a:solidFill>
+                  <a:srgbClr val="FFFFFF"/>
+                </a:solidFill>
+                <a:latin typeface="Calibri" pitchFamily="34" charset="0"/>
+                <a:ea typeface="Calibri" pitchFamily="34" charset="-122"/>
+                <a:cs typeface="Calibri" pitchFamily="34" charset="-120"/>
+              </a:rPr>
+              <a:t>La concentración empresarial no tiene el mismo significado en todos los sectores. El resultado de Comercio es robusto; en Alojamiento y comidas cambia al controlar la concentración relativa; y en Agricultura, la relación cambia también en el tiempo. Detalle completo: docs/metodologia/metodologia.md.</a:t>
+            </a:r>
+            <a:endParaRPr lang="en-US" sz="1100" dirty="0"/>
+          </a:p>
+        </p:txBody>
+      </p:sp>
+      <p:sp>
+        <p:nvSpPr>
+          <p:cNvPr id="13" name="Text 11"/>
+          <p:cNvSpPr/>
+          <p:nvPr/>
+        </p:nvSpPr>
+        <p:spPr>
+          <a:xfrm>
+            <a:off x="11000232" y="6355080"/>
+            <a:ext cx="914400" cy="274320"/>
+          </a:xfrm>
+          <a:prstGeom prst="rect">
+            <a:avLst/>
+          </a:prstGeom>
+          <a:noFill/>
+          <a:ln/>
+        </p:spPr>
+        <p:txBody>
+          <a:bodyPr wrap="square" lIns="0" tIns="0" rIns="0" bIns="0" rtlCol="0" anchor="ctr"/>
+          <a:lstStyle/>
+          <a:p>
+            <a:pPr algn="r" indent="0" marL="0">
+              <a:buNone/>
+            </a:pPr>
+            <a:r>
+              <a:rPr lang="en-US" sz="900" dirty="0">
+                <a:solidFill>
+                  <a:srgbClr val="52697A"/>
+                </a:solidFill>
+                <a:latin typeface="Courier New" pitchFamily="34" charset="0"/>
+                <a:ea typeface="Courier New" pitchFamily="34" charset="-122"/>
+                <a:cs typeface="Courier New" pitchFamily="34" charset="-120"/>
+              </a:rPr>
+              <a:t>16 / 18</a:t>
+            </a:r>
+            <a:endParaRPr lang="en-US" sz="900" dirty="0"/>
+          </a:p>
+        </p:txBody>
+      </p:sp>
+    </p:spTree>
+  </p:cSld>
+  <p:clrMapOvr>
+    <a:masterClrMapping/>
+  </p:clrMapOvr>
+</p:sld>
+</file>
+
+<file path=ppt/slides/slide17.xml><?xml version="1.0" encoding="utf-8"?>
+<p:sld xmlns:a="http://schemas.openxmlformats.org/drawingml/2006/main" xmlns:r="http://schemas.openxmlformats.org/officeDocument/2006/relationships" xmlns:p="http://schemas.openxmlformats.org/presentationml/2006/main">
+  <p:cSld name="Slide 17">
+    <p:bg>
+      <p:bgPr>
+        <a:solidFill>
+          <a:srgbClr val="F6F8FA"/>
+        </a:solidFill>
+      </p:bgPr>
+    </p:bg>
+    <p:spTree>
+      <p:nvGrpSpPr>
+        <p:cNvPr id="1" name=""/>
+        <p:cNvGrpSpPr/>
+        <p:nvPr/>
+      </p:nvGrpSpPr>
+      <p:grpSpPr>
+        <a:xfrm>
+          <a:off x="0" y="0"/>
+          <a:ext cx="0" cy="0"/>
+          <a:chOff x="0" y="0"/>
+          <a:chExt cx="0" cy="0"/>
+        </a:xfrm>
+      </p:grpSpPr>
+      <p:sp>
+        <p:nvSpPr>
           <p:cNvPr id="2" name="Shape 0"/>
           <p:cNvSpPr/>
           <p:nvPr/>
@@ -6395,7 +6936,7 @@
       </p:sp>
       <p:graphicFrame>
         <p:nvGraphicFramePr>
-          <p:cNvPr id="17" name="Table 0"/>
+          <p:cNvPr id="18" name="Table 0"/>
           <p:cNvGraphicFramePr>
             <a:graphicFrameLocks noGrp="1"/>
           </p:cNvGraphicFramePr>
@@ -7749,7 +8290,7 @@
                 <a:ea typeface="Courier New" pitchFamily="34" charset="-122"/>
                 <a:cs typeface="Courier New" pitchFamily="34" charset="-120"/>
               </a:rPr>
-              <a:t>16 / 17</a:t>
+              <a:t>17 / 18</a:t>
             </a:r>
             <a:endParaRPr lang="en-US" sz="900" dirty="0"/>
           </a:p>
@@ -7763,9 +8304,9 @@
 </p:sld>
 </file>
 
-<file path=ppt/slides/slide17.xml><?xml version="1.0" encoding="utf-8"?>
+<file path=ppt/slides/slide18.xml><?xml version="1.0" encoding="utf-8"?>
 <p:sld xmlns:a="http://schemas.openxmlformats.org/drawingml/2006/main" xmlns:r="http://schemas.openxmlformats.org/officeDocument/2006/relationships" xmlns:p="http://schemas.openxmlformats.org/presentationml/2006/main">
-  <p:cSld name="Slide 17">
+  <p:cSld name="Slide 18">
     <p:bg>
       <p:bgPr>
         <a:solidFill>
@@ -7981,7 +8522,7 @@
                 <a:ea typeface="Courier New" pitchFamily="34" charset="-122"/>
                 <a:cs typeface="Courier New" pitchFamily="34" charset="-120"/>
               </a:rPr>
-              <a:t>17 / 17</a:t>
+              <a:t>18 / 18</a:t>
             </a:r>
             <a:endParaRPr lang="en-US" sz="900" dirty="0"/>
           </a:p>
@@ -8714,7 +9255,7 @@
                 <a:ea typeface="Courier New" pitchFamily="34" charset="-122"/>
                 <a:cs typeface="Courier New" pitchFamily="34" charset="-120"/>
               </a:rPr>
-              <a:t>02 / 17</a:t>
+              <a:t>02 / 18</a:t>
             </a:r>
             <a:endParaRPr lang="en-US" sz="900" dirty="0"/>
           </a:p>
@@ -9541,7 +10082,7 @@
                 <a:ea typeface="Courier New" pitchFamily="34" charset="-122"/>
                 <a:cs typeface="Courier New" pitchFamily="34" charset="-120"/>
               </a:rPr>
-              <a:t>03 / 17</a:t>
+              <a:t>03 / 18</a:t>
             </a:r>
             <a:endParaRPr lang="en-US" sz="900" dirty="0"/>
           </a:p>
@@ -10054,7 +10595,7 @@
                 <a:ea typeface="Courier New" pitchFamily="34" charset="-122"/>
                 <a:cs typeface="Courier New" pitchFamily="34" charset="-120"/>
               </a:rPr>
-              <a:t>04 / 17</a:t>
+              <a:t>04 / 18</a:t>
             </a:r>
             <a:endParaRPr lang="en-US" sz="900" dirty="0"/>
           </a:p>
@@ -11125,7 +11666,7 @@
                 <a:ea typeface="Courier New" pitchFamily="34" charset="-122"/>
                 <a:cs typeface="Courier New" pitchFamily="34" charset="-120"/>
               </a:rPr>
-              <a:t>05 / 17</a:t>
+              <a:t>05 / 18</a:t>
             </a:r>
             <a:endParaRPr lang="en-US" sz="900" dirty="0"/>
           </a:p>
@@ -12348,7 +12889,7 @@
                 <a:ea typeface="Courier New" pitchFamily="34" charset="-122"/>
                 <a:cs typeface="Courier New" pitchFamily="34" charset="-120"/>
               </a:rPr>
-              <a:t>06 / 17</a:t>
+              <a:t>06 / 18</a:t>
             </a:r>
             <a:endParaRPr lang="en-US" sz="900" dirty="0"/>
           </a:p>
@@ -13974,7 +14515,7 @@
                 <a:ea typeface="Courier New" pitchFamily="34" charset="-122"/>
                 <a:cs typeface="Courier New" pitchFamily="34" charset="-120"/>
               </a:rPr>
-              <a:t>07 / 17</a:t>
+              <a:t>07 / 18</a:t>
             </a:r>
             <a:endParaRPr lang="en-US" sz="900" dirty="0"/>
           </a:p>
@@ -14671,7 +15212,7 @@
                 <a:ea typeface="Courier New" pitchFamily="34" charset="-122"/>
                 <a:cs typeface="Courier New" pitchFamily="34" charset="-120"/>
               </a:rPr>
-              <a:t>08 / 17</a:t>
+              <a:t>08 / 18</a:t>
             </a:r>
             <a:endParaRPr lang="en-US" sz="900" dirty="0"/>
           </a:p>
@@ -15397,7 +15938,7 @@
                 <a:ea typeface="Courier New" pitchFamily="34" charset="-122"/>
                 <a:cs typeface="Courier New" pitchFamily="34" charset="-120"/>
               </a:rPr>
-              <a:t>09 / 17</a:t>
+              <a:t>09 / 18</a:t>
             </a:r>
             <a:endParaRPr lang="en-US" sz="900" dirty="0"/>
           </a:p>

--- a/docs/presentacion/PYME_Studio_Presentacion.pptx
+++ b/docs/presentacion/PYME_Studio_Presentacion.pptx
@@ -5147,7 +5147,7 @@
                 <a:ea typeface="Calibri" pitchFamily="34" charset="-122"/>
                 <a:cs typeface="Calibri" pitchFamily="34" charset="-120"/>
               </a:rPr>
-              <a:t>En comercio minorista y alojamiento/comidas, la saturación comercial se asocia con mayor cierre de forma estadísticamente robusta (n grande, p &lt; 0,0001).</a:t>
+              <a:t>En comercio minorista y alojamiento/comidas, la concentración de empresas se asocia con mayor cierre — un resultado que se mantiene al excluir 2016 y al corregir por comparaciones múltiples (n grande, p &lt; 0,0001), aunque no fue igual de fuerte todos los años (detalle: diapositivas 15-16).</a:t>
             </a:r>
             <a:endParaRPr lang="en-US" sz="1150" dirty="0"/>
           </a:p>
@@ -6735,7 +6735,7 @@
                 <a:ea typeface="Calibri" pitchFamily="34" charset="-122"/>
                 <a:cs typeface="Calibri" pitchFamily="34" charset="-120"/>
               </a:rPr>
-              <a:t>La concentración empresarial no tiene el mismo significado en todos los sectores. El resultado de Comercio es robusto; en Alojamiento y comidas cambia al controlar la concentración relativa; y en Agricultura, la relación cambia también en el tiempo. Detalle completo: docs/metodologia/metodologia.md.</a:t>
+              <a:t>La concentración empresarial no tiene el mismo significado en todos los sectores. Comercio resiste excluir 2016, cambiar a concentración relativa, y corregir por comparaciones múltiples; en Alojamiento y comidas se invierte al usar concentración relativa; y en Agricultura, la relación cambia de signo en el tiempo. Detalle completo: docs/metodologia/metodologia.md.</a:t>
             </a:r>
             <a:endParaRPr lang="en-US" sz="1100" dirty="0"/>
           </a:p>
